--- a/resume/pdf/Recursion.pptx
+++ b/resume/pdf/Recursion.pptx
@@ -47,8 +47,6 @@
     <p:sldId id="292" r:id="rId43"/>
     <p:sldId id="293" r:id="rId44"/>
     <p:sldId id="294" r:id="rId45"/>
-    <p:sldId id="295" r:id="rId46"/>
-    <p:sldId id="296" r:id="rId47"/>
   </p:sldIdLst>
   <p:sldSz cy="5143500" cx="9144000"/>
   <p:notesSz cx="6858000" cy="9144000"/>
@@ -3218,7 +3216,7 @@
       </p:grpSpPr>
       <p:sp>
         <p:nvSpPr>
-          <p:cNvPr id="265" name="Google Shape;265;g4fc8d547cd_0_215:notes"/>
+          <p:cNvPr id="265" name="Google Shape;265;g4fc8d547cd_0_230:notes"/>
           <p:cNvSpPr/>
           <p:nvPr>
             <p:ph idx="2" type="sldImg"/>
@@ -3253,7 +3251,7 @@
       </p:sp>
       <p:sp>
         <p:nvSpPr>
-          <p:cNvPr id="266" name="Google Shape;266;g4fc8d547cd_0_215:notes"/>
+          <p:cNvPr id="266" name="Google Shape;266;g4fc8d547cd_0_230:notes"/>
           <p:cNvSpPr txBox="1"/>
           <p:nvPr>
             <p:ph idx="1" type="body"/>
@@ -3303,7 +3301,7 @@
   <p:cSld>
     <p:spTree>
       <p:nvGrpSpPr>
-        <p:cNvPr id="272" name="Shape 272"/>
+        <p:cNvPr id="271" name="Shape 271"/>
         <p:cNvGrpSpPr/>
         <p:nvPr/>
       </p:nvGrpSpPr>
@@ -3317,7 +3315,7 @@
       </p:grpSpPr>
       <p:sp>
         <p:nvSpPr>
-          <p:cNvPr id="273" name="Google Shape;273;g4fc8d547cd_0_353:notes"/>
+          <p:cNvPr id="272" name="Google Shape;272;g4fc8d547cd_0_205:notes"/>
           <p:cNvSpPr/>
           <p:nvPr>
             <p:ph idx="2" type="sldImg"/>
@@ -3352,7 +3350,7 @@
       </p:sp>
       <p:sp>
         <p:nvSpPr>
-          <p:cNvPr id="274" name="Google Shape;274;g4fc8d547cd_0_353:notes"/>
+          <p:cNvPr id="273" name="Google Shape;273;g4fc8d547cd_0_205:notes"/>
           <p:cNvSpPr txBox="1"/>
           <p:nvPr>
             <p:ph idx="1" type="body"/>
@@ -3402,7 +3400,7 @@
   <p:cSld>
     <p:spTree>
       <p:nvGrpSpPr>
-        <p:cNvPr id="280" name="Shape 280"/>
+        <p:cNvPr id="277" name="Shape 277"/>
         <p:cNvGrpSpPr/>
         <p:nvPr/>
       </p:nvGrpSpPr>
@@ -3416,7 +3414,7 @@
       </p:grpSpPr>
       <p:sp>
         <p:nvSpPr>
-          <p:cNvPr id="281" name="Google Shape;281;g4fc8d547cd_0_205:notes"/>
+          <p:cNvPr id="278" name="Google Shape;278;g4fc8d547cd_0_365:notes"/>
           <p:cNvSpPr/>
           <p:nvPr>
             <p:ph idx="2" type="sldImg"/>
@@ -3451,7 +3449,7 @@
       </p:sp>
       <p:sp>
         <p:nvSpPr>
-          <p:cNvPr id="282" name="Google Shape;282;g4fc8d547cd_0_205:notes"/>
+          <p:cNvPr id="279" name="Google Shape;279;g4fc8d547cd_0_365:notes"/>
           <p:cNvSpPr txBox="1"/>
           <p:nvPr>
             <p:ph idx="1" type="body"/>
@@ -3501,7 +3499,7 @@
   <p:cSld>
     <p:spTree>
       <p:nvGrpSpPr>
-        <p:cNvPr id="286" name="Shape 286"/>
+        <p:cNvPr id="283" name="Shape 283"/>
         <p:cNvGrpSpPr/>
         <p:nvPr/>
       </p:nvGrpSpPr>
@@ -3515,7 +3513,7 @@
       </p:grpSpPr>
       <p:sp>
         <p:nvSpPr>
-          <p:cNvPr id="287" name="Google Shape;287;g4fc8d547cd_0_230:notes"/>
+          <p:cNvPr id="284" name="Google Shape;284;g4fc8d547cd_0_386:notes"/>
           <p:cNvSpPr/>
           <p:nvPr>
             <p:ph idx="2" type="sldImg"/>
@@ -3550,7 +3548,7 @@
       </p:sp>
       <p:sp>
         <p:nvSpPr>
-          <p:cNvPr id="288" name="Google Shape;288;g4fc8d547cd_0_230:notes"/>
+          <p:cNvPr id="285" name="Google Shape;285;g4fc8d547cd_0_386:notes"/>
           <p:cNvSpPr txBox="1"/>
           <p:nvPr>
             <p:ph idx="1" type="body"/>
@@ -3600,7 +3598,7 @@
   <p:cSld>
     <p:spTree>
       <p:nvGrpSpPr>
-        <p:cNvPr id="293" name="Shape 293"/>
+        <p:cNvPr id="290" name="Shape 290"/>
         <p:cNvGrpSpPr/>
         <p:nvPr/>
       </p:nvGrpSpPr>
@@ -3614,7 +3612,7 @@
       </p:grpSpPr>
       <p:sp>
         <p:nvSpPr>
-          <p:cNvPr id="294" name="Google Shape;294;g4fc8d547cd_0_365:notes"/>
+          <p:cNvPr id="291" name="Google Shape;291;g4fc8d547cd_0_371:notes"/>
           <p:cNvSpPr/>
           <p:nvPr>
             <p:ph idx="2" type="sldImg"/>
@@ -3649,7 +3647,7 @@
       </p:sp>
       <p:sp>
         <p:nvSpPr>
-          <p:cNvPr id="295" name="Google Shape;295;g4fc8d547cd_0_365:notes"/>
+          <p:cNvPr id="292" name="Google Shape;292;g4fc8d547cd_0_371:notes"/>
           <p:cNvSpPr txBox="1"/>
           <p:nvPr>
             <p:ph idx="1" type="body"/>
@@ -3699,7 +3697,7 @@
   <p:cSld>
     <p:spTree>
       <p:nvGrpSpPr>
-        <p:cNvPr id="299" name="Shape 299"/>
+        <p:cNvPr id="297" name="Shape 297"/>
         <p:cNvGrpSpPr/>
         <p:nvPr/>
       </p:nvGrpSpPr>
@@ -3713,7 +3711,7 @@
       </p:grpSpPr>
       <p:sp>
         <p:nvSpPr>
-          <p:cNvPr id="300" name="Google Shape;300;g4fc8d547cd_0_386:notes"/>
+          <p:cNvPr id="298" name="Google Shape;298;g4fc8d547cd_0_376:notes"/>
           <p:cNvSpPr/>
           <p:nvPr>
             <p:ph idx="2" type="sldImg"/>
@@ -3748,7 +3746,7 @@
       </p:sp>
       <p:sp>
         <p:nvSpPr>
-          <p:cNvPr id="301" name="Google Shape;301;g4fc8d547cd_0_386:notes"/>
+          <p:cNvPr id="299" name="Google Shape;299;g4fc8d547cd_0_376:notes"/>
           <p:cNvSpPr txBox="1"/>
           <p:nvPr>
             <p:ph idx="1" type="body"/>
@@ -3798,7 +3796,7 @@
   <p:cSld>
     <p:spTree>
       <p:nvGrpSpPr>
-        <p:cNvPr id="306" name="Shape 306"/>
+        <p:cNvPr id="304" name="Shape 304"/>
         <p:cNvGrpSpPr/>
         <p:nvPr/>
       </p:nvGrpSpPr>
@@ -3812,7 +3810,7 @@
       </p:grpSpPr>
       <p:sp>
         <p:nvSpPr>
-          <p:cNvPr id="307" name="Google Shape;307;g4fc8d547cd_0_371:notes"/>
+          <p:cNvPr id="305" name="Google Shape;305;g4fc8d547cd_0_402:notes"/>
           <p:cNvSpPr/>
           <p:nvPr>
             <p:ph idx="2" type="sldImg"/>
@@ -3847,7 +3845,7 @@
       </p:sp>
       <p:sp>
         <p:nvSpPr>
-          <p:cNvPr id="308" name="Google Shape;308;g4fc8d547cd_0_371:notes"/>
+          <p:cNvPr id="306" name="Google Shape;306;g4fc8d547cd_0_402:notes"/>
           <p:cNvSpPr txBox="1"/>
           <p:nvPr>
             <p:ph idx="1" type="body"/>
@@ -3897,7 +3895,7 @@
   <p:cSld>
     <p:spTree>
       <p:nvGrpSpPr>
-        <p:cNvPr id="313" name="Shape 313"/>
+        <p:cNvPr id="310" name="Shape 310"/>
         <p:cNvGrpSpPr/>
         <p:nvPr/>
       </p:nvGrpSpPr>
@@ -3911,7 +3909,7 @@
       </p:grpSpPr>
       <p:sp>
         <p:nvSpPr>
-          <p:cNvPr id="314" name="Google Shape;314;g4fc8d547cd_0_376:notes"/>
+          <p:cNvPr id="311" name="Google Shape;311;g4fc8d547cd_0_240:notes"/>
           <p:cNvSpPr/>
           <p:nvPr>
             <p:ph idx="2" type="sldImg"/>
@@ -3946,7 +3944,7 @@
       </p:sp>
       <p:sp>
         <p:nvSpPr>
-          <p:cNvPr id="315" name="Google Shape;315;g4fc8d547cd_0_376:notes"/>
+          <p:cNvPr id="312" name="Google Shape;312;g4fc8d547cd_0_240:notes"/>
           <p:cNvSpPr txBox="1"/>
           <p:nvPr>
             <p:ph idx="1" type="body"/>
@@ -4046,204 +4044,6 @@
       <p:sp>
         <p:nvSpPr>
           <p:cNvPr id="69" name="Google Shape;69;g4fc8d547cd_0_10:notes"/>
-          <p:cNvSpPr txBox="1"/>
-          <p:nvPr>
-            <p:ph idx="1" type="body"/>
-          </p:nvPr>
-        </p:nvSpPr>
-        <p:spPr>
-          <a:xfrm>
-            <a:off x="685800" y="4343400"/>
-            <a:ext cx="5486400" cy="4114800"/>
-          </a:xfrm>
-          <a:prstGeom prst="rect">
-            <a:avLst/>
-          </a:prstGeom>
-        </p:spPr>
-        <p:txBody>
-          <a:bodyPr anchorCtr="0" anchor="t" bIns="91425" lIns="91425" spcFirstLastPara="1" rIns="91425" wrap="square" tIns="91425">
-            <a:noAutofit/>
-          </a:bodyPr>
-          <a:lstStyle/>
-          <a:p>
-            <a:pPr indent="0" lvl="0" marL="0" rtl="0" algn="l">
-              <a:spcBef>
-                <a:spcPts val="0"/>
-              </a:spcBef>
-              <a:spcAft>
-                <a:spcPts val="0"/>
-              </a:spcAft>
-              <a:buNone/>
-            </a:pPr>
-            <a:r>
-              <a:t/>
-            </a:r>
-            <a:endParaRPr/>
-          </a:p>
-        </p:txBody>
-      </p:sp>
-    </p:spTree>
-  </p:cSld>
-  <p:clrMapOvr>
-    <a:masterClrMapping/>
-  </p:clrMapOvr>
-</p:notes>
-</file>
-
-<file path=ppt/notesSlides/notesSlide40.xml><?xml version="1.0" encoding="utf-8"?>
-<p:notes xmlns:a="http://schemas.openxmlformats.org/drawingml/2006/main" xmlns:r="http://schemas.openxmlformats.org/officeDocument/2006/relationships" xmlns:mc="http://schemas.openxmlformats.org/markup-compatibility/2006" xmlns:mv="urn:schemas-microsoft-com:mac:vml" xmlns:p="http://schemas.openxmlformats.org/presentationml/2006/main" xmlns:c="http://schemas.openxmlformats.org/drawingml/2006/chart" xmlns:dgm="http://schemas.openxmlformats.org/drawingml/2006/diagram" xmlns:o="urn:schemas-microsoft-com:office:office" xmlns:v="urn:schemas-microsoft-com:vml" xmlns:pvml="urn:schemas-microsoft-com:office:powerpoint" xmlns:com="http://schemas.openxmlformats.org/drawingml/2006/compatibility" xmlns:p14="http://schemas.microsoft.com/office/powerpoint/2010/main" xmlns:p15="http://schemas.microsoft.com/office/powerpoint/2012/main" showMasterPhAnim="0" showMasterSp="0">
-  <p:cSld>
-    <p:spTree>
-      <p:nvGrpSpPr>
-        <p:cNvPr id="320" name="Shape 320"/>
-        <p:cNvGrpSpPr/>
-        <p:nvPr/>
-      </p:nvGrpSpPr>
-      <p:grpSpPr>
-        <a:xfrm>
-          <a:off x="0" y="0"/>
-          <a:ext cx="0" cy="0"/>
-          <a:chOff x="0" y="0"/>
-          <a:chExt cx="0" cy="0"/>
-        </a:xfrm>
-      </p:grpSpPr>
-      <p:sp>
-        <p:nvSpPr>
-          <p:cNvPr id="321" name="Google Shape;321;g4fc8d547cd_0_402:notes"/>
-          <p:cNvSpPr/>
-          <p:nvPr>
-            <p:ph idx="2" type="sldImg"/>
-          </p:nvPr>
-        </p:nvSpPr>
-        <p:spPr>
-          <a:xfrm>
-            <a:off x="381300" y="685800"/>
-            <a:ext cx="6096000" cy="3429000"/>
-          </a:xfrm>
-          <a:custGeom>
-            <a:rect b="b" l="l" r="r" t="t"/>
-            <a:pathLst>
-              <a:path extrusionOk="0" h="120000" w="120000">
-                <a:moveTo>
-                  <a:pt x="0" y="0"/>
-                </a:moveTo>
-                <a:lnTo>
-                  <a:pt x="120000" y="0"/>
-                </a:lnTo>
-                <a:lnTo>
-                  <a:pt x="120000" y="120000"/>
-                </a:lnTo>
-                <a:lnTo>
-                  <a:pt x="0" y="120000"/>
-                </a:lnTo>
-                <a:close/>
-              </a:path>
-            </a:pathLst>
-          </a:custGeom>
-        </p:spPr>
-      </p:sp>
-      <p:sp>
-        <p:nvSpPr>
-          <p:cNvPr id="322" name="Google Shape;322;g4fc8d547cd_0_402:notes"/>
-          <p:cNvSpPr txBox="1"/>
-          <p:nvPr>
-            <p:ph idx="1" type="body"/>
-          </p:nvPr>
-        </p:nvSpPr>
-        <p:spPr>
-          <a:xfrm>
-            <a:off x="685800" y="4343400"/>
-            <a:ext cx="5486400" cy="4114800"/>
-          </a:xfrm>
-          <a:prstGeom prst="rect">
-            <a:avLst/>
-          </a:prstGeom>
-        </p:spPr>
-        <p:txBody>
-          <a:bodyPr anchorCtr="0" anchor="t" bIns="91425" lIns="91425" spcFirstLastPara="1" rIns="91425" wrap="square" tIns="91425">
-            <a:noAutofit/>
-          </a:bodyPr>
-          <a:lstStyle/>
-          <a:p>
-            <a:pPr indent="0" lvl="0" marL="0" rtl="0" algn="l">
-              <a:spcBef>
-                <a:spcPts val="0"/>
-              </a:spcBef>
-              <a:spcAft>
-                <a:spcPts val="0"/>
-              </a:spcAft>
-              <a:buNone/>
-            </a:pPr>
-            <a:r>
-              <a:t/>
-            </a:r>
-            <a:endParaRPr/>
-          </a:p>
-        </p:txBody>
-      </p:sp>
-    </p:spTree>
-  </p:cSld>
-  <p:clrMapOvr>
-    <a:masterClrMapping/>
-  </p:clrMapOvr>
-</p:notes>
-</file>
-
-<file path=ppt/notesSlides/notesSlide41.xml><?xml version="1.0" encoding="utf-8"?>
-<p:notes xmlns:a="http://schemas.openxmlformats.org/drawingml/2006/main" xmlns:r="http://schemas.openxmlformats.org/officeDocument/2006/relationships" xmlns:mc="http://schemas.openxmlformats.org/markup-compatibility/2006" xmlns:mv="urn:schemas-microsoft-com:mac:vml" xmlns:p="http://schemas.openxmlformats.org/presentationml/2006/main" xmlns:c="http://schemas.openxmlformats.org/drawingml/2006/chart" xmlns:dgm="http://schemas.openxmlformats.org/drawingml/2006/diagram" xmlns:o="urn:schemas-microsoft-com:office:office" xmlns:v="urn:schemas-microsoft-com:vml" xmlns:pvml="urn:schemas-microsoft-com:office:powerpoint" xmlns:com="http://schemas.openxmlformats.org/drawingml/2006/compatibility" xmlns:p14="http://schemas.microsoft.com/office/powerpoint/2010/main" xmlns:p15="http://schemas.microsoft.com/office/powerpoint/2012/main" showMasterPhAnim="0" showMasterSp="0">
-  <p:cSld>
-    <p:spTree>
-      <p:nvGrpSpPr>
-        <p:cNvPr id="326" name="Shape 326"/>
-        <p:cNvGrpSpPr/>
-        <p:nvPr/>
-      </p:nvGrpSpPr>
-      <p:grpSpPr>
-        <a:xfrm>
-          <a:off x="0" y="0"/>
-          <a:ext cx="0" cy="0"/>
-          <a:chOff x="0" y="0"/>
-          <a:chExt cx="0" cy="0"/>
-        </a:xfrm>
-      </p:grpSpPr>
-      <p:sp>
-        <p:nvSpPr>
-          <p:cNvPr id="327" name="Google Shape;327;g4fc8d547cd_0_240:notes"/>
-          <p:cNvSpPr/>
-          <p:nvPr>
-            <p:ph idx="2" type="sldImg"/>
-          </p:nvPr>
-        </p:nvSpPr>
-        <p:spPr>
-          <a:xfrm>
-            <a:off x="381300" y="685800"/>
-            <a:ext cx="6096000" cy="3429000"/>
-          </a:xfrm>
-          <a:custGeom>
-            <a:rect b="b" l="l" r="r" t="t"/>
-            <a:pathLst>
-              <a:path extrusionOk="0" h="120000" w="120000">
-                <a:moveTo>
-                  <a:pt x="0" y="0"/>
-                </a:moveTo>
-                <a:lnTo>
-                  <a:pt x="120000" y="0"/>
-                </a:lnTo>
-                <a:lnTo>
-                  <a:pt x="120000" y="120000"/>
-                </a:lnTo>
-                <a:lnTo>
-                  <a:pt x="0" y="120000"/>
-                </a:lnTo>
-                <a:close/>
-              </a:path>
-            </a:pathLst>
-          </a:custGeom>
-        </p:spPr>
-      </p:sp>
-      <p:sp>
-        <p:nvSpPr>
-          <p:cNvPr id="328" name="Google Shape;328;g4fc8d547cd_0_240:notes"/>
           <p:cNvSpPr txBox="1"/>
           <p:nvPr>
             <p:ph idx="1" type="body"/>
@@ -13238,8 +13038,7 @@
               <a:buNone/>
             </a:pPr>
             <a:r>
-              <a:rPr lang="pt-BR"/>
-              <a:t>Towers of Hanoi</a:t>
+              <a:t/>
             </a:r>
             <a:endParaRPr/>
           </a:p>
@@ -13255,8 +13054,8 @@
         </p:nvSpPr>
         <p:spPr>
           <a:xfrm>
-            <a:off x="4968925" y="1152475"/>
-            <a:ext cx="3863400" cy="3416400"/>
+            <a:off x="311700" y="1152475"/>
+            <a:ext cx="8520600" cy="3416400"/>
           </a:xfrm>
           <a:prstGeom prst="rect">
             <a:avLst/>
@@ -13273,98 +13072,12 @@
                 <a:spcPts val="0"/>
               </a:spcBef>
               <a:spcAft>
-                <a:spcPts val="0"/>
+                <a:spcPts val="1600"/>
               </a:spcAft>
               <a:buNone/>
             </a:pPr>
             <a:r>
               <a:t/>
-            </a:r>
-            <a:endParaRPr/>
-          </a:p>
-          <a:p>
-            <a:pPr indent="0" lvl="0" marL="0" rtl="0" algn="l">
-              <a:spcBef>
-                <a:spcPts val="1600"/>
-              </a:spcBef>
-              <a:spcAft>
-                <a:spcPts val="0"/>
-              </a:spcAft>
-              <a:buNone/>
-            </a:pPr>
-            <a:r>
-              <a:rPr lang="pt-BR"/>
-              <a:t>(a) Initial state.</a:t>
-            </a:r>
-            <a:endParaRPr/>
-          </a:p>
-          <a:p>
-            <a:pPr indent="0" lvl="0" marL="0" rtl="0" algn="l">
-              <a:spcBef>
-                <a:spcPts val="1600"/>
-              </a:spcBef>
-              <a:spcAft>
-                <a:spcPts val="0"/>
-              </a:spcAft>
-              <a:buNone/>
-            </a:pPr>
-            <a:r>
-              <a:t/>
-            </a:r>
-            <a:endParaRPr/>
-          </a:p>
-          <a:p>
-            <a:pPr indent="0" lvl="0" marL="0" rtl="0" algn="l">
-              <a:spcBef>
-                <a:spcPts val="1600"/>
-              </a:spcBef>
-              <a:spcAft>
-                <a:spcPts val="0"/>
-              </a:spcAft>
-              <a:buNone/>
-            </a:pPr>
-            <a:r>
-              <a:t/>
-            </a:r>
-            <a:endParaRPr/>
-          </a:p>
-          <a:p>
-            <a:pPr indent="0" lvl="0" marL="0" rtl="0" algn="l">
-              <a:spcBef>
-                <a:spcPts val="1600"/>
-              </a:spcBef>
-              <a:spcAft>
-                <a:spcPts val="1600"/>
-              </a:spcAft>
-              <a:buNone/>
-            </a:pPr>
-            <a:r>
-              <a:rPr lang="pt-BR"/>
-              <a:t>(b) Move </a:t>
-            </a:r>
-            <a:r>
-              <a:rPr i="1" lang="pt-BR"/>
-              <a:t>n-1</a:t>
-            </a:r>
-            <a:r>
-              <a:rPr lang="pt-BR"/>
-              <a:t> disks from </a:t>
-            </a:r>
-            <a:r>
-              <a:rPr b="1" lang="pt-BR"/>
-              <a:t>A</a:t>
-            </a:r>
-            <a:r>
-              <a:rPr lang="pt-BR"/>
-              <a:t> to </a:t>
-            </a:r>
-            <a:r>
-              <a:rPr b="1" lang="pt-BR"/>
-              <a:t>C</a:t>
-            </a:r>
-            <a:r>
-              <a:rPr lang="pt-BR"/>
-              <a:t>.</a:t>
             </a:r>
             <a:endParaRPr/>
           </a:p>
@@ -13386,36 +13099,8 @@
         </p:blipFill>
         <p:spPr>
           <a:xfrm>
-            <a:off x="311701" y="1017725"/>
-            <a:ext cx="4657225" cy="1789050"/>
-          </a:xfrm>
-          <a:prstGeom prst="rect">
-            <a:avLst/>
-          </a:prstGeom>
-          <a:noFill/>
-          <a:ln>
-            <a:noFill/>
-          </a:ln>
-        </p:spPr>
-      </p:pic>
-      <p:pic>
-        <p:nvPicPr>
-          <p:cNvPr id="271" name="Google Shape;271;p44"/>
-          <p:cNvPicPr preferRelativeResize="0"/>
-          <p:nvPr/>
-        </p:nvPicPr>
-        <p:blipFill>
-          <a:blip r:embed="rId4">
-            <a:alphaModFix/>
-          </a:blip>
-          <a:stretch>
-            <a:fillRect/>
-          </a:stretch>
-        </p:blipFill>
-        <p:spPr>
-          <a:xfrm>
-            <a:off x="311700" y="2806775"/>
-            <a:ext cx="4657224" cy="1749824"/>
+            <a:off x="1314450" y="742950"/>
+            <a:ext cx="6515100" cy="3657600"/>
           </a:xfrm>
           <a:prstGeom prst="rect">
             <a:avLst/>
@@ -13439,7 +13124,7 @@
   <p:cSld>
     <p:spTree>
       <p:nvGrpSpPr>
-        <p:cNvPr id="275" name="Shape 275"/>
+        <p:cNvPr id="274" name="Shape 274"/>
         <p:cNvGrpSpPr/>
         <p:nvPr/>
       </p:nvGrpSpPr>
@@ -13453,7 +13138,7 @@
       </p:grpSpPr>
       <p:sp>
         <p:nvSpPr>
-          <p:cNvPr id="276" name="Google Shape;276;p45"/>
+          <p:cNvPr id="275" name="Google Shape;275;p45"/>
           <p:cNvSpPr txBox="1"/>
           <p:nvPr>
             <p:ph type="title"/>
@@ -13493,7 +13178,7 @@
       </p:sp>
       <p:sp>
         <p:nvSpPr>
-          <p:cNvPr id="277" name="Google Shape;277;p45"/>
+          <p:cNvPr id="276" name="Google Shape;276;p45"/>
           <p:cNvSpPr txBox="1"/>
           <p:nvPr>
             <p:ph idx="1" type="body"/>
@@ -13501,8 +13186,8 @@
         </p:nvSpPr>
         <p:spPr>
           <a:xfrm>
-            <a:off x="4968925" y="1152475"/>
-            <a:ext cx="3863400" cy="3416400"/>
+            <a:off x="311700" y="1152475"/>
+            <a:ext cx="8520600" cy="3416400"/>
           </a:xfrm>
           <a:prstGeom prst="rect">
             <a:avLst/>
@@ -13514,33 +13199,27 @@
           </a:bodyPr>
           <a:lstStyle/>
           <a:p>
-            <a:pPr indent="0" lvl="0" marL="0" rtl="0" algn="l">
-              <a:spcBef>
-                <a:spcPts val="0"/>
-              </a:spcBef>
-              <a:spcAft>
-                <a:spcPts val="0"/>
-              </a:spcAft>
-              <a:buNone/>
-            </a:pPr>
-            <a:r>
-              <a:t/>
-            </a:r>
-            <a:endParaRPr/>
-          </a:p>
-          <a:p>
-            <a:pPr indent="0" lvl="0" marL="0" rtl="0" algn="l">
-              <a:spcBef>
-                <a:spcPts val="1600"/>
-              </a:spcBef>
-              <a:spcAft>
-                <a:spcPts val="0"/>
-              </a:spcAft>
-              <a:buNone/>
-            </a:pPr>
-            <a:r>
-              <a:rPr lang="pt-BR"/>
-              <a:t>(c) Move 1 disk from </a:t>
+            <a:pPr indent="-342900" lvl="0" marL="457200" rtl="0" algn="l">
+              <a:spcBef>
+                <a:spcPts val="0"/>
+              </a:spcBef>
+              <a:spcAft>
+                <a:spcPts val="0"/>
+              </a:spcAft>
+              <a:buSzPts val="1800"/>
+              <a:buChar char="●"/>
+            </a:pPr>
+            <a:r>
+              <a:rPr lang="pt-BR"/>
+              <a:t>Problem: starting with </a:t>
+            </a:r>
+            <a:r>
+              <a:rPr i="1" lang="pt-BR"/>
+              <a:t>n</a:t>
+            </a:r>
+            <a:r>
+              <a:rPr lang="pt-BR"/>
+              <a:t> disks on pole </a:t>
             </a:r>
             <a:r>
               <a:rPr b="1" lang="pt-BR"/>
@@ -13548,7 +13227,7 @@
             </a:r>
             <a:r>
               <a:rPr lang="pt-BR"/>
-              <a:t> to </a:t>
+              <a:t> and zero on poles </a:t>
             </a:r>
             <a:r>
               <a:rPr b="1" lang="pt-BR"/>
@@ -13556,61 +13235,7 @@
             </a:r>
             <a:r>
               <a:rPr lang="pt-BR"/>
-              <a:t>.</a:t>
-            </a:r>
-            <a:endParaRPr/>
-          </a:p>
-          <a:p>
-            <a:pPr indent="0" lvl="0" marL="0" rtl="0" algn="l">
-              <a:spcBef>
-                <a:spcPts val="1600"/>
-              </a:spcBef>
-              <a:spcAft>
-                <a:spcPts val="0"/>
-              </a:spcAft>
-              <a:buNone/>
-            </a:pPr>
-            <a:r>
-              <a:t/>
-            </a:r>
-            <a:endParaRPr/>
-          </a:p>
-          <a:p>
-            <a:pPr indent="0" lvl="0" marL="0" rtl="0" algn="l">
-              <a:spcBef>
-                <a:spcPts val="1600"/>
-              </a:spcBef>
-              <a:spcAft>
-                <a:spcPts val="0"/>
-              </a:spcAft>
-              <a:buNone/>
-            </a:pPr>
-            <a:r>
-              <a:t/>
-            </a:r>
-            <a:endParaRPr/>
-          </a:p>
-          <a:p>
-            <a:pPr indent="0" lvl="0" marL="0" rtl="0" algn="l">
-              <a:spcBef>
-                <a:spcPts val="1600"/>
-              </a:spcBef>
-              <a:spcAft>
-                <a:spcPts val="1600"/>
-              </a:spcAft>
-              <a:buNone/>
-            </a:pPr>
-            <a:r>
-              <a:rPr lang="pt-BR"/>
-              <a:t>(b) Move </a:t>
-            </a:r>
-            <a:r>
-              <a:rPr i="1" lang="pt-BR"/>
-              <a:t>n-1</a:t>
-            </a:r>
-            <a:r>
-              <a:rPr lang="pt-BR"/>
-              <a:t> disks from </a:t>
+              <a:t> and </a:t>
             </a:r>
             <a:r>
               <a:rPr b="1" lang="pt-BR"/>
@@ -13618,7 +13243,131 @@
             </a:r>
             <a:r>
               <a:rPr lang="pt-BR"/>
-              <a:t> to </a:t>
+              <a:t>. Move all disks to pole </a:t>
+            </a:r>
+            <a:r>
+              <a:rPr b="1" lang="pt-BR"/>
+              <a:t>C</a:t>
+            </a:r>
+            <a:r>
+              <a:rPr lang="pt-BR"/>
+              <a:t> without having a larger disk resting on top of a smaller disk. Solve function </a:t>
+            </a:r>
+            <a:r>
+              <a:rPr i="1" lang="pt-BR"/>
+              <a:t>solveTowers(n, A, B, C)</a:t>
+            </a:r>
+            <a:r>
+              <a:rPr lang="pt-BR"/>
+              <a:t>.</a:t>
+            </a:r>
+            <a:endParaRPr/>
+          </a:p>
+          <a:p>
+            <a:pPr indent="-342900" lvl="0" marL="457200" rtl="0" algn="l">
+              <a:spcBef>
+                <a:spcPts val="0"/>
+              </a:spcBef>
+              <a:spcAft>
+                <a:spcPts val="0"/>
+              </a:spcAft>
+              <a:buSzPts val="1800"/>
+              <a:buChar char="●"/>
+            </a:pPr>
+            <a:r>
+              <a:rPr lang="pt-BR"/>
+              <a:t>Solution:</a:t>
+            </a:r>
+            <a:endParaRPr/>
+          </a:p>
+          <a:p>
+            <a:pPr indent="-317500" lvl="1" marL="914400" rtl="0" algn="l">
+              <a:spcBef>
+                <a:spcPts val="0"/>
+              </a:spcBef>
+              <a:spcAft>
+                <a:spcPts val="0"/>
+              </a:spcAft>
+              <a:buSzPts val="1400"/>
+              <a:buChar char="○"/>
+            </a:pPr>
+            <a:r>
+              <a:rPr lang="pt-BR"/>
+              <a:t>With all disks on </a:t>
+            </a:r>
+            <a:r>
+              <a:rPr b="1" lang="pt-BR"/>
+              <a:t>A</a:t>
+            </a:r>
+            <a:r>
+              <a:rPr lang="pt-BR"/>
+              <a:t>, solve </a:t>
+            </a:r>
+            <a:r>
+              <a:rPr i="1" lang="pt-BR"/>
+              <a:t>solveTowers(n-1, A, C, B)</a:t>
+            </a:r>
+            <a:r>
+              <a:rPr lang="pt-BR"/>
+              <a:t>.</a:t>
+            </a:r>
+            <a:endParaRPr/>
+          </a:p>
+          <a:p>
+            <a:pPr indent="-317500" lvl="1" marL="914400" rtl="0" algn="l">
+              <a:spcBef>
+                <a:spcPts val="0"/>
+              </a:spcBef>
+              <a:spcAft>
+                <a:spcPts val="0"/>
+              </a:spcAft>
+              <a:buSzPts val="1400"/>
+              <a:buChar char="○"/>
+            </a:pPr>
+            <a:r>
+              <a:rPr lang="pt-BR"/>
+              <a:t>With largest disk on </a:t>
+            </a:r>
+            <a:r>
+              <a:rPr b="1" lang="pt-BR"/>
+              <a:t>A</a:t>
+            </a:r>
+            <a:r>
+              <a:rPr lang="pt-BR"/>
+              <a:t>, and all others on </a:t>
+            </a:r>
+            <a:r>
+              <a:rPr b="1" lang="pt-BR"/>
+              <a:t>C</a:t>
+            </a:r>
+            <a:r>
+              <a:rPr lang="pt-BR"/>
+              <a:t>, </a:t>
+            </a:r>
+            <a:r>
+              <a:rPr i="1" lang="pt-BR"/>
+              <a:t>solveTowers(n-1, A, B, C)</a:t>
+            </a:r>
+            <a:r>
+              <a:rPr lang="pt-BR"/>
+              <a:t>.</a:t>
+            </a:r>
+            <a:endParaRPr/>
+          </a:p>
+          <a:p>
+            <a:pPr indent="-317500" lvl="1" marL="914400" rtl="0" algn="l">
+              <a:spcBef>
+                <a:spcPts val="0"/>
+              </a:spcBef>
+              <a:spcAft>
+                <a:spcPts val="0"/>
+              </a:spcAft>
+              <a:buSzPts val="1400"/>
+              <a:buChar char="○"/>
+            </a:pPr>
+            <a:r>
+              <a:rPr lang="pt-BR"/>
+              <a:t>With largest disk on </a:t>
             </a:r>
             <a:r>
               <a:rPr b="1" lang="pt-BR"/>
@@ -13626,68 +13375,28 @@
             </a:r>
             <a:r>
               <a:rPr lang="pt-BR"/>
+              <a:t>, and all others on </a:t>
+            </a:r>
+            <a:r>
+              <a:rPr b="1" lang="pt-BR"/>
+              <a:t>C</a:t>
+            </a:r>
+            <a:r>
+              <a:rPr lang="pt-BR"/>
+              <a:t>, </a:t>
+            </a:r>
+            <a:r>
+              <a:rPr i="1" lang="pt-BR"/>
+              <a:t>solveTowers(n-1, C, B, A)</a:t>
+            </a:r>
+            <a:r>
+              <a:rPr lang="pt-BR"/>
               <a:t>.</a:t>
             </a:r>
             <a:endParaRPr/>
           </a:p>
         </p:txBody>
       </p:sp>
-      <p:pic>
-        <p:nvPicPr>
-          <p:cNvPr id="278" name="Google Shape;278;p45"/>
-          <p:cNvPicPr preferRelativeResize="0"/>
-          <p:nvPr/>
-        </p:nvPicPr>
-        <p:blipFill>
-          <a:blip r:embed="rId3">
-            <a:alphaModFix/>
-          </a:blip>
-          <a:stretch>
-            <a:fillRect/>
-          </a:stretch>
-        </p:blipFill>
-        <p:spPr>
-          <a:xfrm>
-            <a:off x="311700" y="1152475"/>
-            <a:ext cx="4538078" cy="1789050"/>
-          </a:xfrm>
-          <a:prstGeom prst="rect">
-            <a:avLst/>
-          </a:prstGeom>
-          <a:noFill/>
-          <a:ln>
-            <a:noFill/>
-          </a:ln>
-        </p:spPr>
-      </p:pic>
-      <p:pic>
-        <p:nvPicPr>
-          <p:cNvPr id="279" name="Google Shape;279;p45"/>
-          <p:cNvPicPr preferRelativeResize="0"/>
-          <p:nvPr/>
-        </p:nvPicPr>
-        <p:blipFill>
-          <a:blip r:embed="rId4">
-            <a:alphaModFix/>
-          </a:blip>
-          <a:stretch>
-            <a:fillRect/>
-          </a:stretch>
-        </p:blipFill>
-        <p:spPr>
-          <a:xfrm>
-            <a:off x="311700" y="3076275"/>
-            <a:ext cx="4451705" cy="1897175"/>
-          </a:xfrm>
-          <a:prstGeom prst="rect">
-            <a:avLst/>
-          </a:prstGeom>
-          <a:noFill/>
-          <a:ln>
-            <a:noFill/>
-          </a:ln>
-        </p:spPr>
-      </p:pic>
     </p:spTree>
   </p:cSld>
   <p:clrMapOvr>
@@ -13701,7 +13410,7 @@
   <p:cSld>
     <p:spTree>
       <p:nvGrpSpPr>
-        <p:cNvPr id="283" name="Shape 283"/>
+        <p:cNvPr id="280" name="Shape 280"/>
         <p:cNvGrpSpPr/>
         <p:nvPr/>
       </p:nvGrpSpPr>
@@ -13715,7 +13424,7 @@
       </p:grpSpPr>
       <p:sp>
         <p:nvSpPr>
-          <p:cNvPr id="284" name="Google Shape;284;p46"/>
+          <p:cNvPr id="281" name="Google Shape;281;p46"/>
           <p:cNvSpPr txBox="1"/>
           <p:nvPr>
             <p:ph type="title"/>
@@ -13747,233 +13456,40 @@
             </a:pPr>
             <a:r>
               <a:rPr lang="pt-BR"/>
-              <a:t>Towers of Hanoi</a:t>
+              <a:t>Towers of Hanoi: solution</a:t>
             </a:r>
             <a:endParaRPr/>
           </a:p>
         </p:txBody>
       </p:sp>
-      <p:sp>
-        <p:nvSpPr>
-          <p:cNvPr id="285" name="Google Shape;285;p46"/>
-          <p:cNvSpPr txBox="1"/>
-          <p:nvPr>
-            <p:ph idx="1" type="body"/>
-          </p:nvPr>
-        </p:nvSpPr>
-        <p:spPr>
-          <a:xfrm>
-            <a:off x="311700" y="1152475"/>
-            <a:ext cx="8520600" cy="3416400"/>
-          </a:xfrm>
-          <a:prstGeom prst="rect">
-            <a:avLst/>
-          </a:prstGeom>
-        </p:spPr>
-        <p:txBody>
-          <a:bodyPr anchorCtr="0" anchor="t" bIns="91425" lIns="91425" spcFirstLastPara="1" rIns="91425" wrap="square" tIns="91425">
-            <a:noAutofit/>
-          </a:bodyPr>
-          <a:lstStyle/>
-          <a:p>
-            <a:pPr indent="-342900" lvl="0" marL="457200" rtl="0" algn="l">
-              <a:spcBef>
-                <a:spcPts val="0"/>
-              </a:spcBef>
-              <a:spcAft>
-                <a:spcPts val="0"/>
-              </a:spcAft>
-              <a:buSzPts val="1800"/>
-              <a:buChar char="●"/>
-            </a:pPr>
-            <a:r>
-              <a:rPr lang="pt-BR"/>
-              <a:t>Problem: starting with </a:t>
-            </a:r>
-            <a:r>
-              <a:rPr i="1" lang="pt-BR"/>
-              <a:t>n</a:t>
-            </a:r>
-            <a:r>
-              <a:rPr lang="pt-BR"/>
-              <a:t> disks on pole </a:t>
-            </a:r>
-            <a:r>
-              <a:rPr b="1" lang="pt-BR"/>
-              <a:t>A</a:t>
-            </a:r>
-            <a:r>
-              <a:rPr lang="pt-BR"/>
-              <a:t> and zero on poles </a:t>
-            </a:r>
-            <a:r>
-              <a:rPr b="1" lang="pt-BR"/>
-              <a:t>B</a:t>
-            </a:r>
-            <a:r>
-              <a:rPr lang="pt-BR"/>
-              <a:t> and </a:t>
-            </a:r>
-            <a:r>
-              <a:rPr b="1" lang="pt-BR"/>
-              <a:t>C</a:t>
-            </a:r>
-            <a:r>
-              <a:rPr lang="pt-BR"/>
-              <a:t>. Move all disks to pole </a:t>
-            </a:r>
-            <a:r>
-              <a:rPr b="1" lang="pt-BR"/>
-              <a:t>C</a:t>
-            </a:r>
-            <a:r>
-              <a:rPr lang="pt-BR"/>
-              <a:t> without having a larger disk resting on top of a smaller disk. Solve function </a:t>
-            </a:r>
-            <a:r>
-              <a:rPr i="1" lang="pt-BR"/>
-              <a:t>solveTowers(n, A, B, C)</a:t>
-            </a:r>
-            <a:r>
-              <a:rPr lang="pt-BR"/>
-              <a:t>.</a:t>
-            </a:r>
-            <a:endParaRPr/>
-          </a:p>
-          <a:p>
-            <a:pPr indent="-342900" lvl="0" marL="457200" rtl="0" algn="l">
-              <a:spcBef>
-                <a:spcPts val="0"/>
-              </a:spcBef>
-              <a:spcAft>
-                <a:spcPts val="0"/>
-              </a:spcAft>
-              <a:buSzPts val="1800"/>
-              <a:buChar char="●"/>
-            </a:pPr>
-            <a:r>
-              <a:rPr lang="pt-BR"/>
-              <a:t>Solution:</a:t>
-            </a:r>
-            <a:endParaRPr/>
-          </a:p>
-          <a:p>
-            <a:pPr indent="-317500" lvl="1" marL="914400" rtl="0" algn="l">
-              <a:spcBef>
-                <a:spcPts val="0"/>
-              </a:spcBef>
-              <a:spcAft>
-                <a:spcPts val="0"/>
-              </a:spcAft>
-              <a:buSzPts val="1400"/>
-              <a:buChar char="○"/>
-            </a:pPr>
-            <a:r>
-              <a:rPr lang="pt-BR"/>
-              <a:t>With all disks on </a:t>
-            </a:r>
-            <a:r>
-              <a:rPr b="1" lang="pt-BR"/>
-              <a:t>A</a:t>
-            </a:r>
-            <a:r>
-              <a:rPr lang="pt-BR"/>
-              <a:t>, solve </a:t>
-            </a:r>
-            <a:r>
-              <a:rPr i="1" lang="pt-BR"/>
-              <a:t>solveTowers(n-1, A, C, B)</a:t>
-            </a:r>
-            <a:r>
-              <a:rPr lang="pt-BR"/>
-              <a:t>.</a:t>
-            </a:r>
-            <a:endParaRPr/>
-          </a:p>
-          <a:p>
-            <a:pPr indent="-317500" lvl="1" marL="914400" rtl="0" algn="l">
-              <a:spcBef>
-                <a:spcPts val="0"/>
-              </a:spcBef>
-              <a:spcAft>
-                <a:spcPts val="0"/>
-              </a:spcAft>
-              <a:buSzPts val="1400"/>
-              <a:buChar char="○"/>
-            </a:pPr>
-            <a:r>
-              <a:rPr lang="pt-BR"/>
-              <a:t>With largest disk on </a:t>
-            </a:r>
-            <a:r>
-              <a:rPr b="1" lang="pt-BR"/>
-              <a:t>A</a:t>
-            </a:r>
-            <a:r>
-              <a:rPr lang="pt-BR"/>
-              <a:t>, and all others on </a:t>
-            </a:r>
-            <a:r>
-              <a:rPr b="1" lang="pt-BR"/>
-              <a:t>C</a:t>
-            </a:r>
-            <a:r>
-              <a:rPr lang="pt-BR"/>
-              <a:t>, </a:t>
-            </a:r>
-            <a:r>
-              <a:rPr i="1" lang="pt-BR"/>
-              <a:t>solveTowers(n-1, A, B, C)</a:t>
-            </a:r>
-            <a:r>
-              <a:rPr lang="pt-BR"/>
-              <a:t>.</a:t>
-            </a:r>
-            <a:endParaRPr/>
-          </a:p>
-          <a:p>
-            <a:pPr indent="-317500" lvl="1" marL="914400" rtl="0" algn="l">
-              <a:spcBef>
-                <a:spcPts val="0"/>
-              </a:spcBef>
-              <a:spcAft>
-                <a:spcPts val="0"/>
-              </a:spcAft>
-              <a:buSzPts val="1400"/>
-              <a:buChar char="○"/>
-            </a:pPr>
-            <a:r>
-              <a:rPr lang="pt-BR"/>
-              <a:t>With largest disk on </a:t>
-            </a:r>
-            <a:r>
-              <a:rPr b="1" lang="pt-BR"/>
-              <a:t>B</a:t>
-            </a:r>
-            <a:r>
-              <a:rPr lang="pt-BR"/>
-              <a:t>, and all others on </a:t>
-            </a:r>
-            <a:r>
-              <a:rPr b="1" lang="pt-BR"/>
-              <a:t>C</a:t>
-            </a:r>
-            <a:r>
-              <a:rPr lang="pt-BR"/>
-              <a:t>, </a:t>
-            </a:r>
-            <a:r>
-              <a:rPr i="1" lang="pt-BR"/>
-              <a:t>solveTowers(n-1, C, B, A)</a:t>
-            </a:r>
-            <a:r>
-              <a:rPr lang="pt-BR"/>
-              <a:t>.</a:t>
-            </a:r>
-            <a:endParaRPr/>
-          </a:p>
-        </p:txBody>
-      </p:sp>
+      <p:pic>
+        <p:nvPicPr>
+          <p:cNvPr id="282" name="Google Shape;282;p46"/>
+          <p:cNvPicPr preferRelativeResize="0"/>
+          <p:nvPr/>
+        </p:nvPicPr>
+        <p:blipFill>
+          <a:blip r:embed="rId3">
+            <a:alphaModFix/>
+          </a:blip>
+          <a:stretch>
+            <a:fillRect/>
+          </a:stretch>
+        </p:blipFill>
+        <p:spPr>
+          <a:xfrm>
+            <a:off x="1695450" y="1400175"/>
+            <a:ext cx="5753100" cy="2800350"/>
+          </a:xfrm>
+          <a:prstGeom prst="rect">
+            <a:avLst/>
+          </a:prstGeom>
+          <a:noFill/>
+          <a:ln>
+            <a:noFill/>
+          </a:ln>
+        </p:spPr>
+      </p:pic>
     </p:spTree>
   </p:cSld>
   <p:clrMapOvr>
@@ -13987,7 +13503,7 @@
   <p:cSld>
     <p:spTree>
       <p:nvGrpSpPr>
-        <p:cNvPr id="289" name="Shape 289"/>
+        <p:cNvPr id="286" name="Shape 286"/>
         <p:cNvGrpSpPr/>
         <p:nvPr/>
       </p:nvGrpSpPr>
@@ -14001,7 +13517,7 @@
       </p:grpSpPr>
       <p:sp>
         <p:nvSpPr>
-          <p:cNvPr id="290" name="Google Shape;290;p47"/>
+          <p:cNvPr id="287" name="Google Shape;287;p47"/>
           <p:cNvSpPr txBox="1"/>
           <p:nvPr>
             <p:ph type="title"/>
@@ -14032,7 +13548,8 @@
               <a:buNone/>
             </a:pPr>
             <a:r>
-              <a:t/>
+              <a:rPr lang="pt-BR"/>
+              <a:t>Towers of Hanoi: recursive calls</a:t>
             </a:r>
             <a:endParaRPr/>
           </a:p>
@@ -14040,7 +13557,7 @@
       </p:sp>
       <p:sp>
         <p:nvSpPr>
-          <p:cNvPr id="291" name="Google Shape;291;p47"/>
+          <p:cNvPr id="288" name="Google Shape;288;p47"/>
           <p:cNvSpPr txBox="1"/>
           <p:nvPr>
             <p:ph idx="1" type="body"/>
@@ -14048,8 +13565,8 @@
         </p:nvSpPr>
         <p:spPr>
           <a:xfrm>
-            <a:off x="311700" y="1152475"/>
-            <a:ext cx="8520600" cy="3416400"/>
+            <a:off x="311700" y="3819475"/>
+            <a:ext cx="8520600" cy="953100"/>
           </a:xfrm>
           <a:prstGeom prst="rect">
             <a:avLst/>
@@ -14066,12 +13583,46 @@
                 <a:spcPts val="0"/>
               </a:spcBef>
               <a:spcAft>
+                <a:spcPts val="0"/>
+              </a:spcAft>
+              <a:buNone/>
+            </a:pPr>
+            <a:r>
+              <a:rPr lang="pt-BR"/>
+              <a:t>Minimal number of moves: 2</a:t>
+            </a:r>
+            <a:r>
+              <a:rPr baseline="30000" lang="pt-BR"/>
+              <a:t>n</a:t>
+            </a:r>
+            <a:r>
+              <a:rPr lang="pt-BR"/>
+              <a:t> - 1</a:t>
+            </a:r>
+            <a:endParaRPr/>
+          </a:p>
+          <a:p>
+            <a:pPr indent="0" lvl="0" marL="0" rtl="0" algn="l">
+              <a:spcBef>
                 <a:spcPts val="1600"/>
-              </a:spcAft>
-              <a:buNone/>
-            </a:pPr>
-            <a:r>
-              <a:t/>
+              </a:spcBef>
+              <a:spcAft>
+                <a:spcPts val="1600"/>
+              </a:spcAft>
+              <a:buNone/>
+            </a:pPr>
+            <a:r>
+              <a:rPr lang="pt-BR"/>
+              <a:t>Example iterative solution: </a:t>
+            </a:r>
+            <a:r>
+              <a:rPr lang="pt-BR" u="sng">
+                <a:solidFill>
+                  <a:schemeClr val="hlink"/>
+                </a:solidFill>
+                <a:hlinkClick r:id="rId3"/>
+              </a:rPr>
+              <a:t>https://www.geeksforgeeks.org/iterative-tower-of-hanoi/</a:t>
             </a:r>
             <a:endParaRPr/>
           </a:p>
@@ -14079,12 +13630,12 @@
       </p:sp>
       <p:pic>
         <p:nvPicPr>
-          <p:cNvPr id="292" name="Google Shape;292;p47"/>
+          <p:cNvPr id="289" name="Google Shape;289;p47"/>
           <p:cNvPicPr preferRelativeResize="0"/>
           <p:nvPr/>
         </p:nvPicPr>
         <p:blipFill>
-          <a:blip r:embed="rId3">
+          <a:blip r:embed="rId4">
             <a:alphaModFix/>
           </a:blip>
           <a:stretch>
@@ -14093,8 +13644,8 @@
         </p:blipFill>
         <p:spPr>
           <a:xfrm>
-            <a:off x="1314450" y="742950"/>
-            <a:ext cx="6515100" cy="3657600"/>
+            <a:off x="152400" y="1779325"/>
+            <a:ext cx="8839199" cy="1278557"/>
           </a:xfrm>
           <a:prstGeom prst="rect">
             <a:avLst/>
@@ -14118,7 +13669,7 @@
   <p:cSld>
     <p:spTree>
       <p:nvGrpSpPr>
-        <p:cNvPr id="296" name="Shape 296"/>
+        <p:cNvPr id="293" name="Shape 293"/>
         <p:cNvGrpSpPr/>
         <p:nvPr/>
       </p:nvGrpSpPr>
@@ -14132,7 +13683,7 @@
       </p:grpSpPr>
       <p:sp>
         <p:nvSpPr>
-          <p:cNvPr id="297" name="Google Shape;297;p48"/>
+          <p:cNvPr id="294" name="Google Shape;294;p48"/>
           <p:cNvSpPr txBox="1"/>
           <p:nvPr>
             <p:ph type="title"/>
@@ -14164,77 +13715,24 @@
             </a:pPr>
             <a:r>
               <a:rPr lang="pt-BR"/>
-              <a:t>Towers of Hanoi: solution</a:t>
+              <a:t>Binary Search</a:t>
             </a:r>
             <a:endParaRPr/>
           </a:p>
         </p:txBody>
       </p:sp>
-      <p:pic>
-        <p:nvPicPr>
-          <p:cNvPr id="298" name="Google Shape;298;p48"/>
-          <p:cNvPicPr preferRelativeResize="0"/>
-          <p:nvPr/>
-        </p:nvPicPr>
-        <p:blipFill>
-          <a:blip r:embed="rId3">
-            <a:alphaModFix/>
-          </a:blip>
-          <a:stretch>
-            <a:fillRect/>
-          </a:stretch>
-        </p:blipFill>
-        <p:spPr>
-          <a:xfrm>
-            <a:off x="1695450" y="1400175"/>
-            <a:ext cx="5753100" cy="2800350"/>
-          </a:xfrm>
-          <a:prstGeom prst="rect">
-            <a:avLst/>
-          </a:prstGeom>
-          <a:noFill/>
-          <a:ln>
-            <a:noFill/>
-          </a:ln>
-        </p:spPr>
-      </p:pic>
-    </p:spTree>
-  </p:cSld>
-  <p:clrMapOvr>
-    <a:masterClrMapping/>
-  </p:clrMapOvr>
-</p:sld>
-</file>
-
-<file path=ppt/slides/slide37.xml><?xml version="1.0" encoding="utf-8"?>
-<p:sld xmlns:a="http://schemas.openxmlformats.org/drawingml/2006/main" xmlns:r="http://schemas.openxmlformats.org/officeDocument/2006/relationships" xmlns:mc="http://schemas.openxmlformats.org/markup-compatibility/2006" xmlns:mv="urn:schemas-microsoft-com:mac:vml" xmlns:p="http://schemas.openxmlformats.org/presentationml/2006/main" xmlns:c="http://schemas.openxmlformats.org/drawingml/2006/chart" xmlns:dgm="http://schemas.openxmlformats.org/drawingml/2006/diagram" xmlns:o="urn:schemas-microsoft-com:office:office" xmlns:v="urn:schemas-microsoft-com:vml" xmlns:pvml="urn:schemas-microsoft-com:office:powerpoint" xmlns:com="http://schemas.openxmlformats.org/drawingml/2006/compatibility" xmlns:p14="http://schemas.microsoft.com/office/powerpoint/2010/main" xmlns:p15="http://schemas.microsoft.com/office/powerpoint/2012/main">
-  <p:cSld>
-    <p:spTree>
-      <p:nvGrpSpPr>
-        <p:cNvPr id="302" name="Shape 302"/>
-        <p:cNvGrpSpPr/>
-        <p:nvPr/>
-      </p:nvGrpSpPr>
-      <p:grpSpPr>
-        <a:xfrm>
-          <a:off x="0" y="0"/>
-          <a:ext cx="0" cy="0"/>
-          <a:chOff x="0" y="0"/>
-          <a:chExt cx="0" cy="0"/>
-        </a:xfrm>
-      </p:grpSpPr>
-      <p:sp>
-        <p:nvSpPr>
-          <p:cNvPr id="303" name="Google Shape;303;p49"/>
+      <p:sp>
+        <p:nvSpPr>
+          <p:cNvPr id="295" name="Google Shape;295;p48"/>
           <p:cNvSpPr txBox="1"/>
           <p:nvPr>
-            <p:ph type="title"/>
-          </p:nvPr>
-        </p:nvSpPr>
-        <p:spPr>
-          <a:xfrm>
-            <a:off x="311700" y="445025"/>
-            <a:ext cx="8520600" cy="572700"/>
+            <p:ph idx="1" type="body"/>
+          </p:nvPr>
+        </p:nvSpPr>
+        <p:spPr>
+          <a:xfrm>
+            <a:off x="311700" y="1152475"/>
+            <a:ext cx="8520600" cy="3588300"/>
           </a:xfrm>
           <a:prstGeom prst="rect">
             <a:avLst/>
@@ -14246,212 +13744,6 @@
           </a:bodyPr>
           <a:lstStyle/>
           <a:p>
-            <a:pPr indent="0" lvl="0" marL="0" rtl="0" algn="l">
-              <a:spcBef>
-                <a:spcPts val="0"/>
-              </a:spcBef>
-              <a:spcAft>
-                <a:spcPts val="0"/>
-              </a:spcAft>
-              <a:buNone/>
-            </a:pPr>
-            <a:r>
-              <a:rPr lang="pt-BR"/>
-              <a:t>Towers of Hanoi: recursive calls</a:t>
-            </a:r>
-            <a:endParaRPr/>
-          </a:p>
-        </p:txBody>
-      </p:sp>
-      <p:pic>
-        <p:nvPicPr>
-          <p:cNvPr id="304" name="Google Shape;304;p49"/>
-          <p:cNvPicPr preferRelativeResize="0"/>
-          <p:nvPr/>
-        </p:nvPicPr>
-        <p:blipFill>
-          <a:blip r:embed="rId3">
-            <a:alphaModFix/>
-          </a:blip>
-          <a:stretch>
-            <a:fillRect/>
-          </a:stretch>
-        </p:blipFill>
-        <p:spPr>
-          <a:xfrm>
-            <a:off x="1019789" y="1170125"/>
-            <a:ext cx="7104425" cy="2649350"/>
-          </a:xfrm>
-          <a:prstGeom prst="rect">
-            <a:avLst/>
-          </a:prstGeom>
-          <a:noFill/>
-          <a:ln>
-            <a:noFill/>
-          </a:ln>
-        </p:spPr>
-      </p:pic>
-      <p:sp>
-        <p:nvSpPr>
-          <p:cNvPr id="305" name="Google Shape;305;p49"/>
-          <p:cNvSpPr txBox="1"/>
-          <p:nvPr>
-            <p:ph idx="1" type="body"/>
-          </p:nvPr>
-        </p:nvSpPr>
-        <p:spPr>
-          <a:xfrm>
-            <a:off x="311700" y="3819475"/>
-            <a:ext cx="8520600" cy="953100"/>
-          </a:xfrm>
-          <a:prstGeom prst="rect">
-            <a:avLst/>
-          </a:prstGeom>
-        </p:spPr>
-        <p:txBody>
-          <a:bodyPr anchorCtr="0" anchor="t" bIns="91425" lIns="91425" spcFirstLastPara="1" rIns="91425" wrap="square" tIns="91425">
-            <a:noAutofit/>
-          </a:bodyPr>
-          <a:lstStyle/>
-          <a:p>
-            <a:pPr indent="0" lvl="0" marL="0" rtl="0" algn="l">
-              <a:spcBef>
-                <a:spcPts val="0"/>
-              </a:spcBef>
-              <a:spcAft>
-                <a:spcPts val="0"/>
-              </a:spcAft>
-              <a:buNone/>
-            </a:pPr>
-            <a:r>
-              <a:rPr lang="pt-BR"/>
-              <a:t>Minimal number of moves: 2</a:t>
-            </a:r>
-            <a:r>
-              <a:rPr baseline="30000" lang="pt-BR"/>
-              <a:t>n</a:t>
-            </a:r>
-            <a:r>
-              <a:rPr lang="pt-BR"/>
-              <a:t> - 1</a:t>
-            </a:r>
-            <a:endParaRPr/>
-          </a:p>
-          <a:p>
-            <a:pPr indent="0" lvl="0" marL="0" rtl="0" algn="l">
-              <a:spcBef>
-                <a:spcPts val="1600"/>
-              </a:spcBef>
-              <a:spcAft>
-                <a:spcPts val="1600"/>
-              </a:spcAft>
-              <a:buNone/>
-            </a:pPr>
-            <a:r>
-              <a:rPr lang="pt-BR"/>
-              <a:t>Example iterative solution: </a:t>
-            </a:r>
-            <a:r>
-              <a:rPr lang="pt-BR" u="sng">
-                <a:solidFill>
-                  <a:schemeClr val="hlink"/>
-                </a:solidFill>
-                <a:hlinkClick r:id="rId4"/>
-              </a:rPr>
-              <a:t>https://www.geeksforgeeks.org/iterative-tower-of-hanoi/</a:t>
-            </a:r>
-            <a:endParaRPr/>
-          </a:p>
-        </p:txBody>
-      </p:sp>
-    </p:spTree>
-  </p:cSld>
-  <p:clrMapOvr>
-    <a:masterClrMapping/>
-  </p:clrMapOvr>
-</p:sld>
-</file>
-
-<file path=ppt/slides/slide38.xml><?xml version="1.0" encoding="utf-8"?>
-<p:sld xmlns:a="http://schemas.openxmlformats.org/drawingml/2006/main" xmlns:r="http://schemas.openxmlformats.org/officeDocument/2006/relationships" xmlns:mc="http://schemas.openxmlformats.org/markup-compatibility/2006" xmlns:mv="urn:schemas-microsoft-com:mac:vml" xmlns:p="http://schemas.openxmlformats.org/presentationml/2006/main" xmlns:c="http://schemas.openxmlformats.org/drawingml/2006/chart" xmlns:dgm="http://schemas.openxmlformats.org/drawingml/2006/diagram" xmlns:o="urn:schemas-microsoft-com:office:office" xmlns:v="urn:schemas-microsoft-com:vml" xmlns:pvml="urn:schemas-microsoft-com:office:powerpoint" xmlns:com="http://schemas.openxmlformats.org/drawingml/2006/compatibility" xmlns:p14="http://schemas.microsoft.com/office/powerpoint/2010/main" xmlns:p15="http://schemas.microsoft.com/office/powerpoint/2012/main">
-  <p:cSld>
-    <p:spTree>
-      <p:nvGrpSpPr>
-        <p:cNvPr id="309" name="Shape 309"/>
-        <p:cNvGrpSpPr/>
-        <p:nvPr/>
-      </p:nvGrpSpPr>
-      <p:grpSpPr>
-        <a:xfrm>
-          <a:off x="0" y="0"/>
-          <a:ext cx="0" cy="0"/>
-          <a:chOff x="0" y="0"/>
-          <a:chExt cx="0" cy="0"/>
-        </a:xfrm>
-      </p:grpSpPr>
-      <p:sp>
-        <p:nvSpPr>
-          <p:cNvPr id="310" name="Google Shape;310;p50"/>
-          <p:cNvSpPr txBox="1"/>
-          <p:nvPr>
-            <p:ph type="title"/>
-          </p:nvPr>
-        </p:nvSpPr>
-        <p:spPr>
-          <a:xfrm>
-            <a:off x="311700" y="445025"/>
-            <a:ext cx="8520600" cy="572700"/>
-          </a:xfrm>
-          <a:prstGeom prst="rect">
-            <a:avLst/>
-          </a:prstGeom>
-        </p:spPr>
-        <p:txBody>
-          <a:bodyPr anchorCtr="0" anchor="t" bIns="91425" lIns="91425" spcFirstLastPara="1" rIns="91425" wrap="square" tIns="91425">
-            <a:noAutofit/>
-          </a:bodyPr>
-          <a:lstStyle/>
-          <a:p>
-            <a:pPr indent="0" lvl="0" marL="0" rtl="0" algn="l">
-              <a:spcBef>
-                <a:spcPts val="0"/>
-              </a:spcBef>
-              <a:spcAft>
-                <a:spcPts val="0"/>
-              </a:spcAft>
-              <a:buNone/>
-            </a:pPr>
-            <a:r>
-              <a:rPr lang="pt-BR"/>
-              <a:t>Binary Search</a:t>
-            </a:r>
-            <a:endParaRPr/>
-          </a:p>
-        </p:txBody>
-      </p:sp>
-      <p:sp>
-        <p:nvSpPr>
-          <p:cNvPr id="311" name="Google Shape;311;p50"/>
-          <p:cNvSpPr txBox="1"/>
-          <p:nvPr>
-            <p:ph idx="1" type="body"/>
-          </p:nvPr>
-        </p:nvSpPr>
-        <p:spPr>
-          <a:xfrm>
-            <a:off x="311700" y="1152475"/>
-            <a:ext cx="8520600" cy="3588300"/>
-          </a:xfrm>
-          <a:prstGeom prst="rect">
-            <a:avLst/>
-          </a:prstGeom>
-        </p:spPr>
-        <p:txBody>
-          <a:bodyPr anchorCtr="0" anchor="t" bIns="91425" lIns="91425" spcFirstLastPara="1" rIns="91425" wrap="square" tIns="91425">
-            <a:noAutofit/>
-          </a:bodyPr>
-          <a:lstStyle/>
-          <a:p>
             <a:pPr indent="-342900" lvl="0" marL="457200" rtl="0" algn="l">
               <a:spcBef>
                 <a:spcPts val="0"/>
@@ -14693,7 +13985,7 @@
       </p:sp>
       <p:graphicFrame>
         <p:nvGraphicFramePr>
-          <p:cNvPr id="312" name="Google Shape;312;p50"/>
+          <p:cNvPr id="296" name="Google Shape;296;p48"/>
           <p:cNvGraphicFramePr/>
           <p:nvPr/>
         </p:nvGraphicFramePr>
@@ -14706,7 +13998,7 @@
             <a:tbl>
               <a:tblPr>
                 <a:noFill/>
-                <a:tableStyleId>{5F357F82-B525-4A21-B82F-F37E94B41F46}</a:tableStyleId>
+                <a:tableStyleId>{9DE979EC-CEFC-4F5B-973A-C339DF1994AB}</a:tableStyleId>
               </a:tblPr>
               <a:tblGrid>
                 <a:gridCol w="804325"/>
@@ -15185,12 +14477,12 @@
 </p:sld>
 </file>
 
-<file path=ppt/slides/slide39.xml><?xml version="1.0" encoding="utf-8"?>
+<file path=ppt/slides/slide37.xml><?xml version="1.0" encoding="utf-8"?>
 <p:sld xmlns:a="http://schemas.openxmlformats.org/drawingml/2006/main" xmlns:r="http://schemas.openxmlformats.org/officeDocument/2006/relationships" xmlns:mc="http://schemas.openxmlformats.org/markup-compatibility/2006" xmlns:mv="urn:schemas-microsoft-com:mac:vml" xmlns:p="http://schemas.openxmlformats.org/presentationml/2006/main" xmlns:c="http://schemas.openxmlformats.org/drawingml/2006/chart" xmlns:dgm="http://schemas.openxmlformats.org/drawingml/2006/diagram" xmlns:o="urn:schemas-microsoft-com:office:office" xmlns:v="urn:schemas-microsoft-com:vml" xmlns:pvml="urn:schemas-microsoft-com:office:powerpoint" xmlns:com="http://schemas.openxmlformats.org/drawingml/2006/compatibility" xmlns:p14="http://schemas.microsoft.com/office/powerpoint/2010/main" xmlns:p15="http://schemas.microsoft.com/office/powerpoint/2012/main">
   <p:cSld>
     <p:spTree>
       <p:nvGrpSpPr>
-        <p:cNvPr id="316" name="Shape 316"/>
+        <p:cNvPr id="300" name="Shape 300"/>
         <p:cNvGrpSpPr/>
         <p:nvPr/>
       </p:nvGrpSpPr>
@@ -15204,7 +14496,7 @@
       </p:grpSpPr>
       <p:sp>
         <p:nvSpPr>
-          <p:cNvPr id="317" name="Google Shape;317;p51"/>
+          <p:cNvPr id="301" name="Google Shape;301;p49"/>
           <p:cNvSpPr txBox="1"/>
           <p:nvPr>
             <p:ph type="title"/>
@@ -15244,7 +14536,7 @@
       </p:sp>
       <p:pic>
         <p:nvPicPr>
-          <p:cNvPr id="318" name="Google Shape;318;p51"/>
+          <p:cNvPr id="302" name="Google Shape;302;p49"/>
           <p:cNvPicPr preferRelativeResize="0"/>
           <p:nvPr/>
         </p:nvPicPr>
@@ -15272,7 +14564,7 @@
       </p:pic>
       <p:pic>
         <p:nvPicPr>
-          <p:cNvPr id="319" name="Google Shape;319;p51"/>
+          <p:cNvPr id="303" name="Google Shape;303;p49"/>
           <p:cNvPicPr preferRelativeResize="0"/>
           <p:nvPr/>
         </p:nvPicPr>
@@ -15298,6 +14590,236 @@
           </a:ln>
         </p:spPr>
       </p:pic>
+    </p:spTree>
+  </p:cSld>
+  <p:clrMapOvr>
+    <a:masterClrMapping/>
+  </p:clrMapOvr>
+</p:sld>
+</file>
+
+<file path=ppt/slides/slide38.xml><?xml version="1.0" encoding="utf-8"?>
+<p:sld xmlns:a="http://schemas.openxmlformats.org/drawingml/2006/main" xmlns:r="http://schemas.openxmlformats.org/officeDocument/2006/relationships" xmlns:mc="http://schemas.openxmlformats.org/markup-compatibility/2006" xmlns:mv="urn:schemas-microsoft-com:mac:vml" xmlns:p="http://schemas.openxmlformats.org/presentationml/2006/main" xmlns:c="http://schemas.openxmlformats.org/drawingml/2006/chart" xmlns:dgm="http://schemas.openxmlformats.org/drawingml/2006/diagram" xmlns:o="urn:schemas-microsoft-com:office:office" xmlns:v="urn:schemas-microsoft-com:vml" xmlns:pvml="urn:schemas-microsoft-com:office:powerpoint" xmlns:com="http://schemas.openxmlformats.org/drawingml/2006/compatibility" xmlns:p14="http://schemas.microsoft.com/office/powerpoint/2010/main" xmlns:p15="http://schemas.microsoft.com/office/powerpoint/2012/main">
+  <p:cSld>
+    <p:spTree>
+      <p:nvGrpSpPr>
+        <p:cNvPr id="307" name="Shape 307"/>
+        <p:cNvGrpSpPr/>
+        <p:nvPr/>
+      </p:nvGrpSpPr>
+      <p:grpSpPr>
+        <a:xfrm>
+          <a:off x="0" y="0"/>
+          <a:ext cx="0" cy="0"/>
+          <a:chOff x="0" y="0"/>
+          <a:chExt cx="0" cy="0"/>
+        </a:xfrm>
+      </p:grpSpPr>
+      <p:sp>
+        <p:nvSpPr>
+          <p:cNvPr id="308" name="Google Shape;308;p50"/>
+          <p:cNvSpPr txBox="1"/>
+          <p:nvPr>
+            <p:ph type="title"/>
+          </p:nvPr>
+        </p:nvSpPr>
+        <p:spPr>
+          <a:xfrm>
+            <a:off x="311700" y="445025"/>
+            <a:ext cx="8520600" cy="572700"/>
+          </a:xfrm>
+          <a:prstGeom prst="rect">
+            <a:avLst/>
+          </a:prstGeom>
+        </p:spPr>
+        <p:txBody>
+          <a:bodyPr anchorCtr="0" anchor="t" bIns="91425" lIns="91425" spcFirstLastPara="1" rIns="91425" wrap="square" tIns="91425">
+            <a:noAutofit/>
+          </a:bodyPr>
+          <a:lstStyle/>
+          <a:p>
+            <a:pPr indent="0" lvl="0" marL="0" rtl="0" algn="l">
+              <a:spcBef>
+                <a:spcPts val="0"/>
+              </a:spcBef>
+              <a:spcAft>
+                <a:spcPts val="0"/>
+              </a:spcAft>
+              <a:buNone/>
+            </a:pPr>
+            <a:r>
+              <a:rPr lang="pt-BR"/>
+              <a:t>Summarizing</a:t>
+            </a:r>
+            <a:endParaRPr/>
+          </a:p>
+        </p:txBody>
+      </p:sp>
+      <p:sp>
+        <p:nvSpPr>
+          <p:cNvPr id="309" name="Google Shape;309;p50"/>
+          <p:cNvSpPr txBox="1"/>
+          <p:nvPr>
+            <p:ph idx="1" type="body"/>
+          </p:nvPr>
+        </p:nvSpPr>
+        <p:spPr>
+          <a:xfrm>
+            <a:off x="311700" y="1152475"/>
+            <a:ext cx="8520600" cy="3416400"/>
+          </a:xfrm>
+          <a:prstGeom prst="rect">
+            <a:avLst/>
+          </a:prstGeom>
+        </p:spPr>
+        <p:txBody>
+          <a:bodyPr anchorCtr="0" anchor="t" bIns="91425" lIns="91425" spcFirstLastPara="1" rIns="91425" wrap="square" tIns="91425">
+            <a:noAutofit/>
+          </a:bodyPr>
+          <a:lstStyle/>
+          <a:p>
+            <a:pPr indent="-342900" lvl="0" marL="457200" rtl="0" algn="l">
+              <a:spcBef>
+                <a:spcPts val="0"/>
+              </a:spcBef>
+              <a:spcAft>
+                <a:spcPts val="0"/>
+              </a:spcAft>
+              <a:buSzPts val="1800"/>
+              <a:buChar char="●"/>
+            </a:pPr>
+            <a:r>
+              <a:rPr lang="pt-BR"/>
+              <a:t>The challenge in using recursion to solve a problem relies on identifying that a problem </a:t>
+            </a:r>
+            <a:r>
+              <a:rPr i="1" lang="pt-BR"/>
+              <a:t>CAN</a:t>
+            </a:r>
+            <a:r>
+              <a:rPr lang="pt-BR"/>
+              <a:t> be solved by recursion.</a:t>
+            </a:r>
+            <a:endParaRPr/>
+          </a:p>
+          <a:p>
+            <a:pPr indent="-342900" lvl="0" marL="457200" rtl="0" algn="l">
+              <a:spcBef>
+                <a:spcPts val="0"/>
+              </a:spcBef>
+              <a:spcAft>
+                <a:spcPts val="0"/>
+              </a:spcAft>
+              <a:buSzPts val="1800"/>
+              <a:buChar char="●"/>
+            </a:pPr>
+            <a:r>
+              <a:rPr lang="pt-BR"/>
+              <a:t>Determining the base case and make sure it will eventually be triggered, otherwise you'll end up with an infinite recursion call.</a:t>
+            </a:r>
+            <a:endParaRPr/>
+          </a:p>
+          <a:p>
+            <a:pPr indent="-342900" lvl="0" marL="457200" rtl="0" algn="l">
+              <a:spcBef>
+                <a:spcPts val="0"/>
+              </a:spcBef>
+              <a:spcAft>
+                <a:spcPts val="0"/>
+              </a:spcAft>
+              <a:buSzPts val="1800"/>
+              <a:buChar char="●"/>
+            </a:pPr>
+            <a:r>
+              <a:rPr lang="pt-BR"/>
+              <a:t>Important concept to understand, even if you don't use it in your future job.</a:t>
+            </a:r>
+            <a:endParaRPr/>
+          </a:p>
+          <a:p>
+            <a:pPr indent="-342900" lvl="0" marL="457200" rtl="0" algn="l">
+              <a:spcBef>
+                <a:spcPts val="0"/>
+              </a:spcBef>
+              <a:spcAft>
+                <a:spcPts val="0"/>
+              </a:spcAft>
+              <a:buSzPts val="1800"/>
+              <a:buChar char="●"/>
+            </a:pPr>
+            <a:r>
+              <a:rPr lang="pt-BR"/>
+              <a:t>Don't neglect recursion, sometimes an interview question can be solved by using it (and with fewer lines of code).</a:t>
+            </a:r>
+            <a:endParaRPr/>
+          </a:p>
+        </p:txBody>
+      </p:sp>
+    </p:spTree>
+  </p:cSld>
+  <p:clrMapOvr>
+    <a:masterClrMapping/>
+  </p:clrMapOvr>
+</p:sld>
+</file>
+
+<file path=ppt/slides/slide39.xml><?xml version="1.0" encoding="utf-8"?>
+<p:sld xmlns:a="http://schemas.openxmlformats.org/drawingml/2006/main" xmlns:r="http://schemas.openxmlformats.org/officeDocument/2006/relationships" xmlns:mc="http://schemas.openxmlformats.org/markup-compatibility/2006" xmlns:mv="urn:schemas-microsoft-com:mac:vml" xmlns:p="http://schemas.openxmlformats.org/presentationml/2006/main" xmlns:c="http://schemas.openxmlformats.org/drawingml/2006/chart" xmlns:dgm="http://schemas.openxmlformats.org/drawingml/2006/diagram" xmlns:o="urn:schemas-microsoft-com:office:office" xmlns:v="urn:schemas-microsoft-com:vml" xmlns:pvml="urn:schemas-microsoft-com:office:powerpoint" xmlns:com="http://schemas.openxmlformats.org/drawingml/2006/compatibility" xmlns:p14="http://schemas.microsoft.com/office/powerpoint/2010/main" xmlns:p15="http://schemas.microsoft.com/office/powerpoint/2012/main">
+  <p:cSld>
+    <p:spTree>
+      <p:nvGrpSpPr>
+        <p:cNvPr id="313" name="Shape 313"/>
+        <p:cNvGrpSpPr/>
+        <p:nvPr/>
+      </p:nvGrpSpPr>
+      <p:grpSpPr>
+        <a:xfrm>
+          <a:off x="0" y="0"/>
+          <a:ext cx="0" cy="0"/>
+          <a:chOff x="0" y="0"/>
+          <a:chExt cx="0" cy="0"/>
+        </a:xfrm>
+      </p:grpSpPr>
+      <p:sp>
+        <p:nvSpPr>
+          <p:cNvPr id="314" name="Google Shape;314;p51"/>
+          <p:cNvSpPr txBox="1"/>
+          <p:nvPr>
+            <p:ph type="title"/>
+          </p:nvPr>
+        </p:nvSpPr>
+        <p:spPr>
+          <a:xfrm>
+            <a:off x="311700" y="2045225"/>
+            <a:ext cx="8520600" cy="572700"/>
+          </a:xfrm>
+          <a:prstGeom prst="rect">
+            <a:avLst/>
+          </a:prstGeom>
+        </p:spPr>
+        <p:txBody>
+          <a:bodyPr anchorCtr="0" anchor="t" bIns="91425" lIns="91425" spcFirstLastPara="1" rIns="91425" wrap="square" tIns="91425">
+            <a:noAutofit/>
+          </a:bodyPr>
+          <a:lstStyle/>
+          <a:p>
+            <a:pPr indent="0" lvl="0" marL="0" rtl="0" algn="ctr">
+              <a:spcBef>
+                <a:spcPts val="0"/>
+              </a:spcBef>
+              <a:spcAft>
+                <a:spcPts val="0"/>
+              </a:spcAft>
+              <a:buNone/>
+            </a:pPr>
+            <a:r>
+              <a:rPr lang="pt-BR"/>
+              <a:t>Questions?</a:t>
+            </a:r>
+            <a:endParaRPr/>
+          </a:p>
+        </p:txBody>
+      </p:sp>
     </p:spTree>
   </p:cSld>
   <p:clrMapOvr>
@@ -15512,236 +15034,6 @@
           </a:ln>
         </p:spPr>
       </p:pic>
-    </p:spTree>
-  </p:cSld>
-  <p:clrMapOvr>
-    <a:masterClrMapping/>
-  </p:clrMapOvr>
-</p:sld>
-</file>
-
-<file path=ppt/slides/slide40.xml><?xml version="1.0" encoding="utf-8"?>
-<p:sld xmlns:a="http://schemas.openxmlformats.org/drawingml/2006/main" xmlns:r="http://schemas.openxmlformats.org/officeDocument/2006/relationships" xmlns:mc="http://schemas.openxmlformats.org/markup-compatibility/2006" xmlns:mv="urn:schemas-microsoft-com:mac:vml" xmlns:p="http://schemas.openxmlformats.org/presentationml/2006/main" xmlns:c="http://schemas.openxmlformats.org/drawingml/2006/chart" xmlns:dgm="http://schemas.openxmlformats.org/drawingml/2006/diagram" xmlns:o="urn:schemas-microsoft-com:office:office" xmlns:v="urn:schemas-microsoft-com:vml" xmlns:pvml="urn:schemas-microsoft-com:office:powerpoint" xmlns:com="http://schemas.openxmlformats.org/drawingml/2006/compatibility" xmlns:p14="http://schemas.microsoft.com/office/powerpoint/2010/main" xmlns:p15="http://schemas.microsoft.com/office/powerpoint/2012/main">
-  <p:cSld>
-    <p:spTree>
-      <p:nvGrpSpPr>
-        <p:cNvPr id="323" name="Shape 323"/>
-        <p:cNvGrpSpPr/>
-        <p:nvPr/>
-      </p:nvGrpSpPr>
-      <p:grpSpPr>
-        <a:xfrm>
-          <a:off x="0" y="0"/>
-          <a:ext cx="0" cy="0"/>
-          <a:chOff x="0" y="0"/>
-          <a:chExt cx="0" cy="0"/>
-        </a:xfrm>
-      </p:grpSpPr>
-      <p:sp>
-        <p:nvSpPr>
-          <p:cNvPr id="324" name="Google Shape;324;p52"/>
-          <p:cNvSpPr txBox="1"/>
-          <p:nvPr>
-            <p:ph type="title"/>
-          </p:nvPr>
-        </p:nvSpPr>
-        <p:spPr>
-          <a:xfrm>
-            <a:off x="311700" y="445025"/>
-            <a:ext cx="8520600" cy="572700"/>
-          </a:xfrm>
-          <a:prstGeom prst="rect">
-            <a:avLst/>
-          </a:prstGeom>
-        </p:spPr>
-        <p:txBody>
-          <a:bodyPr anchorCtr="0" anchor="t" bIns="91425" lIns="91425" spcFirstLastPara="1" rIns="91425" wrap="square" tIns="91425">
-            <a:noAutofit/>
-          </a:bodyPr>
-          <a:lstStyle/>
-          <a:p>
-            <a:pPr indent="0" lvl="0" marL="0" rtl="0" algn="l">
-              <a:spcBef>
-                <a:spcPts val="0"/>
-              </a:spcBef>
-              <a:spcAft>
-                <a:spcPts val="0"/>
-              </a:spcAft>
-              <a:buNone/>
-            </a:pPr>
-            <a:r>
-              <a:rPr lang="pt-BR"/>
-              <a:t>Summarizing</a:t>
-            </a:r>
-            <a:endParaRPr/>
-          </a:p>
-        </p:txBody>
-      </p:sp>
-      <p:sp>
-        <p:nvSpPr>
-          <p:cNvPr id="325" name="Google Shape;325;p52"/>
-          <p:cNvSpPr txBox="1"/>
-          <p:nvPr>
-            <p:ph idx="1" type="body"/>
-          </p:nvPr>
-        </p:nvSpPr>
-        <p:spPr>
-          <a:xfrm>
-            <a:off x="311700" y="1152475"/>
-            <a:ext cx="8520600" cy="3416400"/>
-          </a:xfrm>
-          <a:prstGeom prst="rect">
-            <a:avLst/>
-          </a:prstGeom>
-        </p:spPr>
-        <p:txBody>
-          <a:bodyPr anchorCtr="0" anchor="t" bIns="91425" lIns="91425" spcFirstLastPara="1" rIns="91425" wrap="square" tIns="91425">
-            <a:noAutofit/>
-          </a:bodyPr>
-          <a:lstStyle/>
-          <a:p>
-            <a:pPr indent="-342900" lvl="0" marL="457200" rtl="0" algn="l">
-              <a:spcBef>
-                <a:spcPts val="0"/>
-              </a:spcBef>
-              <a:spcAft>
-                <a:spcPts val="0"/>
-              </a:spcAft>
-              <a:buSzPts val="1800"/>
-              <a:buChar char="●"/>
-            </a:pPr>
-            <a:r>
-              <a:rPr lang="pt-BR"/>
-              <a:t>The challenge in using recursion to solve a problem relies on identifying that a problem </a:t>
-            </a:r>
-            <a:r>
-              <a:rPr i="1" lang="pt-BR"/>
-              <a:t>CAN</a:t>
-            </a:r>
-            <a:r>
-              <a:rPr lang="pt-BR"/>
-              <a:t> be solved by recursion.</a:t>
-            </a:r>
-            <a:endParaRPr/>
-          </a:p>
-          <a:p>
-            <a:pPr indent="-342900" lvl="0" marL="457200" rtl="0" algn="l">
-              <a:spcBef>
-                <a:spcPts val="0"/>
-              </a:spcBef>
-              <a:spcAft>
-                <a:spcPts val="0"/>
-              </a:spcAft>
-              <a:buSzPts val="1800"/>
-              <a:buChar char="●"/>
-            </a:pPr>
-            <a:r>
-              <a:rPr lang="pt-BR"/>
-              <a:t>Determining the base case and make sure it will eventually be triggered, otherwise you'll end up with an infinite recursion call.</a:t>
-            </a:r>
-            <a:endParaRPr/>
-          </a:p>
-          <a:p>
-            <a:pPr indent="-342900" lvl="0" marL="457200" rtl="0" algn="l">
-              <a:spcBef>
-                <a:spcPts val="0"/>
-              </a:spcBef>
-              <a:spcAft>
-                <a:spcPts val="0"/>
-              </a:spcAft>
-              <a:buSzPts val="1800"/>
-              <a:buChar char="●"/>
-            </a:pPr>
-            <a:r>
-              <a:rPr lang="pt-BR"/>
-              <a:t>Important concept to understand, even if you don't use it in your future job.</a:t>
-            </a:r>
-            <a:endParaRPr/>
-          </a:p>
-          <a:p>
-            <a:pPr indent="-342900" lvl="0" marL="457200" rtl="0" algn="l">
-              <a:spcBef>
-                <a:spcPts val="0"/>
-              </a:spcBef>
-              <a:spcAft>
-                <a:spcPts val="0"/>
-              </a:spcAft>
-              <a:buSzPts val="1800"/>
-              <a:buChar char="●"/>
-            </a:pPr>
-            <a:r>
-              <a:rPr lang="pt-BR"/>
-              <a:t>Don't neglect recursion, sometimes an interview question can be solved by using it (and with fewer lines of code).</a:t>
-            </a:r>
-            <a:endParaRPr/>
-          </a:p>
-        </p:txBody>
-      </p:sp>
-    </p:spTree>
-  </p:cSld>
-  <p:clrMapOvr>
-    <a:masterClrMapping/>
-  </p:clrMapOvr>
-</p:sld>
-</file>
-
-<file path=ppt/slides/slide41.xml><?xml version="1.0" encoding="utf-8"?>
-<p:sld xmlns:a="http://schemas.openxmlformats.org/drawingml/2006/main" xmlns:r="http://schemas.openxmlformats.org/officeDocument/2006/relationships" xmlns:mc="http://schemas.openxmlformats.org/markup-compatibility/2006" xmlns:mv="urn:schemas-microsoft-com:mac:vml" xmlns:p="http://schemas.openxmlformats.org/presentationml/2006/main" xmlns:c="http://schemas.openxmlformats.org/drawingml/2006/chart" xmlns:dgm="http://schemas.openxmlformats.org/drawingml/2006/diagram" xmlns:o="urn:schemas-microsoft-com:office:office" xmlns:v="urn:schemas-microsoft-com:vml" xmlns:pvml="urn:schemas-microsoft-com:office:powerpoint" xmlns:com="http://schemas.openxmlformats.org/drawingml/2006/compatibility" xmlns:p14="http://schemas.microsoft.com/office/powerpoint/2010/main" xmlns:p15="http://schemas.microsoft.com/office/powerpoint/2012/main">
-  <p:cSld>
-    <p:spTree>
-      <p:nvGrpSpPr>
-        <p:cNvPr id="329" name="Shape 329"/>
-        <p:cNvGrpSpPr/>
-        <p:nvPr/>
-      </p:nvGrpSpPr>
-      <p:grpSpPr>
-        <a:xfrm>
-          <a:off x="0" y="0"/>
-          <a:ext cx="0" cy="0"/>
-          <a:chOff x="0" y="0"/>
-          <a:chExt cx="0" cy="0"/>
-        </a:xfrm>
-      </p:grpSpPr>
-      <p:sp>
-        <p:nvSpPr>
-          <p:cNvPr id="330" name="Google Shape;330;p53"/>
-          <p:cNvSpPr txBox="1"/>
-          <p:nvPr>
-            <p:ph type="title"/>
-          </p:nvPr>
-        </p:nvSpPr>
-        <p:spPr>
-          <a:xfrm>
-            <a:off x="311700" y="2045225"/>
-            <a:ext cx="8520600" cy="572700"/>
-          </a:xfrm>
-          <a:prstGeom prst="rect">
-            <a:avLst/>
-          </a:prstGeom>
-        </p:spPr>
-        <p:txBody>
-          <a:bodyPr anchorCtr="0" anchor="t" bIns="91425" lIns="91425" spcFirstLastPara="1" rIns="91425" wrap="square" tIns="91425">
-            <a:noAutofit/>
-          </a:bodyPr>
-          <a:lstStyle/>
-          <a:p>
-            <a:pPr indent="0" lvl="0" marL="0" rtl="0" algn="ctr">
-              <a:spcBef>
-                <a:spcPts val="0"/>
-              </a:spcBef>
-              <a:spcAft>
-                <a:spcPts val="0"/>
-              </a:spcAft>
-              <a:buNone/>
-            </a:pPr>
-            <a:r>
-              <a:rPr lang="pt-BR"/>
-              <a:t>Questions?</a:t>
-            </a:r>
-            <a:endParaRPr/>
-          </a:p>
-        </p:txBody>
-      </p:sp>
     </p:spTree>
   </p:cSld>
   <p:clrMapOvr>
